--- a/_implementation-notes/evening-series/FotH Evening Session 7-8 Combined Slides DRAFT v1.pptx
+++ b/_implementation-notes/evening-series/FotH Evening Session 7-8 Combined Slides DRAFT v1.pptx
@@ -8090,7 +8090,7 @@
           <p:nvPr/>
         </p:nvPicPr>
         <p:blipFill>
-          <a:blip r:embed="rId5"/>
+          <a:blip r:embed="rId6"/>
           <a:stretch>
             <a:fillRect/>
           </a:stretch>

--- a/_implementation-notes/evening-series/FotH Evening Session 7-8 Combined Slides DRAFT v1.pptx
+++ b/_implementation-notes/evening-series/FotH Evening Session 7-8 Combined Slides DRAFT v1.pptx
@@ -1517,7 +1517,7 @@
           <a:p>
             <a:r>
               <a:rPr lang="en-US" sz="1200"/>
-              <a:t>CUES: leadsanions settle odd numbers across families. If the room is about ten or fewer, skip the pairing — one circle, pair up in place.</a:t>
+              <a:t>CUES: Lead Companions settle odd numbers across families. If the room is about ten or fewer, skip the pairing — one circle, pair up in place.</a:t>
             </a:r>
           </a:p>
         </p:txBody>

--- a/_implementation-notes/evening-series/FotH Evening Session 7-8 Combined Slides DRAFT v1.pptx
+++ b/_implementation-notes/evening-series/FotH Evening Session 7-8 Combined Slides DRAFT v1.pptx
@@ -1461,6 +1461,12 @@
               <a:t>CUES: If an Apply goes vague or grand, push gently for one specific concrete application.</a:t>
             </a:r>
           </a:p>
+          <a:p>
+            <a:r>
+              <a:rPr lang="en-US" sz="1200"/>
+              <a:t>WHY: the order protects the hearing — what the text says before what it means. 1. PRAY — we come to hear, not to extract; the Word is His. 2. READ — let it land whole before taking it apart. 3. OBSERVE, the data — the ground: what the page actually says, checkable by anyone; skipping it is where most misreadings start. OBSERVE, the interpretation — what it meant in its own world before it means anything in ours. 4. APPLY — where reading becomes hearing: one specific thing, for me, not for someone else. 5. PRAY AGAIN — hearing becomes a response; obedience starts here. 6. TELL — spoken hearing stays, and someone else hears what you heard. Full page: “PROAPT — What Each Step Is For” (Planning).</a:t>
+            </a:r>
+          </a:p>
         </p:txBody>
       </p:sp>
     </p:spTree>

--- a/_implementation-notes/evening-series/FotH Evening Session 7-8 Combined Slides DRAFT v1.pptx
+++ b/_implementation-notes/evening-series/FotH Evening Session 7-8 Combined Slides DRAFT v1.pptx
@@ -1131,7 +1131,7 @@
           </a:p>
           <a:p>
             <a:r>
-              <a:t>CUES: Passage cards for both passages at each seat; the journal Week 7 pages carry the daily template.</a:t>
+              <a:t>CUES: Passage cards for both passages at each seat; the Pair Card printed, one per pair and a spare; the journal Week 7 pages carry the daily template.</a:t>
             </a:r>
           </a:p>
         </p:txBody>
@@ -1510,20 +1510,17 @@
           <a:lstStyle/>
           <a:p>
             <a:r>
-              <a:rPr lang="en-US" sz="1200"/>
               <a:t>S7 · 7:49–7:50 · LEAD: CONTENT PRESENTER · TRANSITION</a:t>
             </a:r>
           </a:p>
           <a:p>
             <a:r>
-              <a:rPr lang="en-US" sz="1200"/>
-              <a:t>BEATS: 1. Explain the pair shape: parent with your own teen by default; one Reader, one Listener; switch at twelve minutes. 2. Name it: pairing inside your own family is the design working, not the consolation prize. 3. Pray and send.</a:t>
-            </a:r>
-          </a:p>
-          <a:p>
-            <a:r>
-              <a:rPr lang="en-US" sz="1200"/>
-              <a:t>CUES: Lead Companions settle odd numbers across families. If the room is about ten or fewer, skip the pairing — one circle, pair up in place.</a:t>
+              <a:t>BEATS: 1. Explain the pair shape: parent with your own teen by default; one Reader, one Listener; switch at twelve minutes. 2. Name one timekeeper before anyone moves — the container holder by default, or anyone the leaders pick — who calls the switch at 8:02, the Tell at 8:13, and back in the circle at 8:19. 3. Hand each pair a Pair Card. 4. Pray and send.</a:t>
+            </a:r>
+          </a:p>
+          <a:p>
+            <a:r>
+              <a:t>CUES: Lead Companions settle odd numbers across families. Pairs always, even in a small room: the practice is one Reader and one Listener, and a circle cannot give that.</a:t>
             </a:r>
           </a:p>
         </p:txBody>
@@ -1574,7 +1571,17 @@
           </a:p>
           <a:p>
             <a:r>
+              <a:t>TIME TARGETS (the timekeeper calls them): pass one 7:50–8:02; switch at 8:02; pass two 8:02–8:13; the Tell, still in the pair, 8:13–8:19; back in the circle at 8:19 for the merge. If the room is running late, keep the two passes equal and shorten both rather than drop the second.</a:t>
+            </a:r>
+          </a:p>
+          <a:p>
+            <a:r>
               <a:t>BEATS: 1. First pass 12 min: Reader leads the six steps, Listener works alongside without interrupting; Reader's Tell goes to the Listener, one sentence. 2. Switch roles; second pass 12 min, same or new passage. 3. Companions float: stuck on Observe — 'one word or phrase that caught you'; stuck on Apply — 'one specific situation right now'; rushing — 'the Spirit isn't in a hurry'; finished early — another passage, get reps.</a:t>
+            </a:r>
+          </a:p>
+          <a:p>
+            <a:r>
+              <a:t>PRINT: the Pair Card (Leader Notes folder) carries this slide, the six steps, the passages, the times and the stuck-prompts, so each pair has it in hand away from the screen.</a:t>
             </a:r>
           </a:p>
           <a:p>
@@ -1807,19 +1814,16 @@
           <a:lstStyle/>
           <a:p>
             <a:r>
-              <a:rPr lang="en-US" sz="1200"/>
               <a:t>S7 · 8:28–8:30 · LEAD: CONTAINER HOLDER</a:t>
             </a:r>
           </a:p>
           <a:p>
             <a:r>
-              <a:rPr lang="en-US" sz="1200"/>
-              <a:t>BEATS: 1. Bridge the weeks: last week we named hard places, today we practiced hearing — both are real, both are how the Father walks us home; the place named last week is the place PROAPT will keep speaking into. 2. Aaronic blessing, hands up. 3. Send: 'PROAPT one passage tomorrow. See you evenings.'</a:t>
-            </a:r>
-          </a:p>
-          <a:p>
-            <a:r>
-              <a:rPr lang="en-US" sz="1200"/>
+              <a:t>BEATS: 1. Bridge the weeks: last week we named hard places, today we practiced hearing — both are real, both are how the Father walks us home; the place named last week is the place PROAPT will keep speaking into. 2. Blessings: turn away from the screen and face the person. Nothing to read — say what is in front of you for this person, specific and short. Then the Aaronic blessing, hands up. 3. Send: 'PROAPT one passage tomorrow. See you evenings.'</a:t>
+            </a:r>
+          </a:p>
+          <a:p>
+            <a:r>
               <a:t>CUES: Stay accessible after the close for anyone still carrying Week 6.</a:t>
             </a:r>
           </a:p>
@@ -5541,57 +5545,7 @@
                 </a:solidFill>
                 <a:latin typeface="Calibri"/>
               </a:rPr>
-              <a:t>“Pairing up with your own parent or your own teen is not the consolation-prize version — it is the design working.”</a:t>
-            </a:r>
-          </a:p>
-          <a:p>
-            <a:pPr marL="274320" indent="-274320">
-              <a:spcAft>
-                <a:spcPts val="900"/>
-              </a:spcAft>
-            </a:pPr>
-            <a:r>
-              <a:rPr sz="2400" b="1" i="0">
-                <a:solidFill>
-                  <a:srgbClr val="97BC62"/>
-                </a:solidFill>
-                <a:latin typeface="Calibri"/>
-              </a:rPr>
-              <a:t>•  </a:t>
-            </a:r>
-            <a:r>
-              <a:rPr sz="2400" b="0" i="0">
-                <a:solidFill>
-                  <a:srgbClr val="222B22"/>
-                </a:solidFill>
-                <a:latin typeface="Calibri"/>
-              </a:rPr>
               <a:t>Your Lead Companion settles the pairs and completes any odd numbers</a:t>
-            </a:r>
-          </a:p>
-          <a:p>
-            <a:pPr marL="274320" indent="-274320">
-              <a:spcAft>
-                <a:spcPts val="900"/>
-              </a:spcAft>
-            </a:pPr>
-            <a:r>
-              <a:rPr sz="2400" b="1" i="0">
-                <a:solidFill>
-                  <a:srgbClr val="97BC62"/>
-                </a:solidFill>
-                <a:latin typeface="Calibri"/>
-              </a:rPr>
-              <a:t>•  </a:t>
-            </a:r>
-            <a:r>
-              <a:rPr sz="2400" b="0" i="0">
-                <a:solidFill>
-                  <a:srgbClr val="222B22"/>
-                </a:solidFill>
-                <a:latin typeface="Calibri"/>
-              </a:rPr>
-              <a:t>Small room (about ten or fewer)? Stay as one circle and pair up in place</a:t>
             </a:r>
           </a:p>
         </p:txBody>
@@ -6828,15 +6782,15 @@
           <p:nvPr/>
         </p:nvPicPr>
         <p:blipFill>
-          <a:blip r:embed="rId2"/>
+          <a:blip r:embed="rId4"/>
           <a:stretch>
             <a:fillRect/>
           </a:stretch>
         </p:blipFill>
         <p:spPr>
           <a:xfrm>
-            <a:off x="2066004" y="1463040"/>
-            <a:ext cx="8059687" cy="4709160"/>
+            <a:off x="2622284" y="1463040"/>
+            <a:ext cx="6947127" cy="4709160"/>
           </a:xfrm>
           <a:prstGeom prst="rect">
             <a:avLst/>
@@ -7507,7 +7461,7 @@
                 </a:solidFill>
                 <a:latin typeface="Calibri"/>
               </a:rPr>
-              <a:t>Blessings — specific, witnessed, short</a:t>
+              <a:t>Blessings — eyes on the person, not the screen: say what is on your heart for them. Specific, witnessed, short</a:t>
             </a:r>
           </a:p>
           <a:p>

--- a/_implementation-notes/evening-series/FotH Evening Session 7-8 Combined Slides DRAFT v1.pptx
+++ b/_implementation-notes/evening-series/FotH Evening Session 7-8 Combined Slides DRAFT v1.pptx
@@ -940,7 +940,7 @@
           </a:p>
           <a:p>
             <a:r>
-              <a:t>1. The four parts, in order: the homework practice, week one; the end-of-week-one check-in; the homework practice, week two; one sentence of preparation.</a:t>
+              <a:t>1. The four parts, in order: the homework practice, week one; the end-of-week-one check-in; the homework practice, week two; one sentence of preparation. Name the two new lines: choose a paragraph (one central thought), and don't skip the Tell.</a:t>
             </a:r>
           </a:p>
           <a:p>
@@ -1515,7 +1515,7 @@
           </a:p>
           <a:p>
             <a:r>
-              <a:t>BEATS: 1. Explain the pair shape: parent with your own teen by default; one Reader, one Listener; switch at twelve minutes. 2. Name one timekeeper before anyone moves — the container holder by default, or anyone the leaders pick — who calls the switch at 8:02, the Tell at 8:13, and back in the circle at 8:19. 3. Hand each pair a Pair Card. 4. Pray and send.</a:t>
+              <a:t>BEATS: 1. Explain the pair shape: parent with your own teen by default; one Reader, one Listener; switch at twelve minutes. 2. The container holder keeps the clock and calls the switch at 8:02, the Tell at 8:13, and back in the circle at 8:19. 3. Hand each pair a Pair Card. 4. Pray and send.</a:t>
             </a:r>
           </a:p>
           <a:p>
@@ -1571,12 +1571,12 @@
           </a:p>
           <a:p>
             <a:r>
-              <a:t>TIME TARGETS (the timekeeper calls them): pass one 7:50–8:02; switch at 8:02; pass two 8:02–8:13; the Tell, still in the pair, 8:13–8:19; back in the circle at 8:19 for the merge. If the room is running late, keep the two passes equal and shorten both rather than drop the second.</a:t>
-            </a:r>
-          </a:p>
-          <a:p>
-            <a:r>
-              <a:t>BEATS: 1. First pass 12 min: Reader leads the six steps, Listener works alongside without interrupting; Reader's Tell goes to the Listener, one sentence. 2. Switch roles; second pass 12 min, same or new passage. 3. Companions float: stuck on Observe — 'one word or phrase that caught you'; stuck on Apply — 'one specific situation right now'; rushing — 'the Spirit isn't in a hurry'; finished early — another passage, get reps.</a:t>
+              <a:t>TIME TARGETS (the container holder calls them): pass one 7:50–8:02; switch at 8:02; pass two 8:02–8:13; the Tell, still in the pair, 8:13–8:19; back in the circle at 8:19 for the merge. If the room is running late, keep the two passes equal and shorten both rather than drop the second.</a:t>
+            </a:r>
+          </a:p>
+          <a:p>
+            <a:r>
+              <a:t>BEATS: 1. First pass 12 min: Reader leads the six steps, Listener works alongside without interrupting; Reader's Tell goes to the Listener, one sentence. 2. Switch roles; second pass 12 min, same or new passage. For pass one, pairs may take a fresh passage instead of Mark 1:14–20 again: Luke 5:1–11, John 1:35–42, or Mark 10:46–52 (on the Pair Card). 3. Companions float: stuck on Observe — 'one word or phrase that caught you'; stuck on Apply — 'one specific situation right now'; rushing — 'the Spirit isn't in a hurry'; finished early — another passage, get reps.</a:t>
             </a:r>
           </a:p>
           <a:p>

--- a/_implementation-notes/evening-series/FotH Evening Session 7-8 Combined Slides DRAFT v1.pptx
+++ b/_implementation-notes/evening-series/FotH Evening Session 7-8 Combined Slides DRAFT v1.pptx
@@ -788,7 +788,7 @@
           <a:lstStyle/>
           <a:p>
             <a:r>
-              <a:t>S7–8 COMBINED · WELCOME · LEAD: CONTAINER HOLDER · GROUNDING — every session opens on this map</a:t>
+              <a:t>E6 · WELCOME · LEAD: CONTAINER HOLDER · GROUNDING — every session opens on this map</a:t>
             </a:r>
           </a:p>
           <a:p>
@@ -798,7 +798,7 @@
           </a:p>
           <a:p>
             <a:r>
-              <a:t>1. Locate tonight on the map, plainly: Session 7–8 combined stands in the third box — Connect with God — and the practice is walked twice in one evening, teen-led.</a:t>
+              <a:t>1. Locate tonight on the map, plainly: Evening 6 stands in the third box — Connect with God — and the practice is walked twice in one evening, teen-led.</a:t>
             </a:r>
           </a:p>
           <a:p>
@@ -859,7 +859,7 @@
           <a:lstStyle/>
           <a:p>
             <a:r>
-              <a:t>S7 · COMMISSIONING · LEAD: CONTENT PRESENTER</a:t>
+              <a:t>E6 · COMMISSIONING · LEAD: CONTENT PRESENTER</a:t>
             </a:r>
           </a:p>
           <a:p>
@@ -930,7 +930,7 @@
           <a:lstStyle/>
           <a:p>
             <a:r>
-              <a:t>S7 · COMMISSIONING · LEAD: CONTENT PRESENTER</a:t>
+              <a:t>E6 · COMMISSIONING · LEAD: CONTENT PRESENTER</a:t>
             </a:r>
           </a:p>
           <a:p>
@@ -996,7 +996,7 @@
           <a:lstStyle/>
           <a:p>
             <a:r>
-              <a:t>S7–8 COMBINED · pre-session · DIVIDER</a:t>
+              <a:t>E6 · pre-session · DIVIDER</a:t>
             </a:r>
           </a:p>
           <a:p>
@@ -1047,19 +1047,16 @@
           <a:lstStyle/>
           <a:p>
             <a:r>
-              <a:rPr lang="en-US" sz="1200"/>
-              <a:t>S7 · 7:00–7:08 · LEAD: CONTAINER HOLDER</a:t>
-            </a:r>
-          </a:p>
-          <a:p>
-            <a:r>
-              <a:rPr lang="en-US" sz="1200"/>
+              <a:t>E6 · 7:00–7:08 · LEAD: CONTAINER HOLDER</a:t>
+            </a:r>
+          </a:p>
+          <a:p>
+            <a:r>
               <a:t>BEATS: 1. This is John's personal eye-test story — his own testimony of learning to hear God, framing today's turn from Self and Others toward God. 2. Keep it to about one minute; the story serves the practice, not the reverse. 3. Land it and move to Today's Road.</a:t>
             </a:r>
           </a:p>
           <a:p>
             <a:r>
-              <a:rPr lang="en-US" sz="1200"/>
               <a:t>SUB: Never perform someone else's testimony. Tell your own hearing-growth story in one minute — or skip straight to the pull-quote on the slide, read it, and move.</a:t>
             </a:r>
           </a:p>
@@ -1106,7 +1103,7 @@
           <a:lstStyle/>
           <a:p>
             <a:r>
-              <a:t>S7–8 COMBINED · 7:00–8:30 · LEAD: BOTH LEADERS</a:t>
+              <a:t>E6 · 7:00–8:30 · LEAD: BOTH LEADERS</a:t>
             </a:r>
           </a:p>
           <a:p>
@@ -1177,12 +1174,12 @@
           <a:lstStyle/>
           <a:p>
             <a:r>
-              <a:t>S7 · 7:00–7:08 · LEAD: CONTAINER HOLDER</a:t>
-            </a:r>
-          </a:p>
-          <a:p>
-            <a:r>
-              <a:t>BEATS: 1. Aaronic blessing first. 2. Container restated SLOWLY — Safe, Present, Clear, Intentional; a container that sat empty over a break needs a minute to hold again. 3. Frame Week 7 as a turn: the interior work prepared us; today hearing God becomes a learnable skill — six steps, a practice that works.</a:t>
+              <a:t>E6 · 7:00–7:08 · LEAD: CONTAINER HOLDER</a:t>
+            </a:r>
+          </a:p>
+          <a:p>
+            <a:r>
+              <a:t>BEATS: 1. Aaronic blessing first. 2. Container restated SLOWLY — Safe, Present, Clear, Intentional; a container that sat empty over a break needs a minute to hold again. 3. Frame Evening 6 as a turn: the interior work prepared us; today hearing God becomes a learnable skill — six steps, a practice that works.</a:t>
             </a:r>
           </a:p>
           <a:p>
@@ -1238,19 +1235,16 @@
           <a:lstStyle/>
           <a:p>
             <a:r>
-              <a:rPr lang="en-US" sz="1200"/>
-              <a:t>S7 · 7:25–7:34 · LEAD: CONTENT PRESENTER</a:t>
-            </a:r>
-          </a:p>
-          <a:p>
-            <a:r>
-              <a:rPr lang="en-US" sz="1200"/>
-              <a:t>BEATS: 1. Ninety seconds each: one sentence on the Examen, how the break treated the practice, or anything shifted. 2. Say it: 'thinned out over the break' is a completely normal answer — the practice picks up where you are. 3. Take 2–3 contributions, then move. 4. Open door: anyone still carrying Week 6, find a Companion before leaving today.</a:t>
-            </a:r>
-          </a:p>
-          <a:p>
-            <a:r>
-              <a:rPr lang="en-US" sz="1200"/>
+              <a:t>E6 · 7:25–7:34 · LEAD: CONTENT PRESENTER</a:t>
+            </a:r>
+          </a:p>
+          <a:p>
+            <a:r>
+              <a:t>BEATS: 1. Ninety seconds each: one sentence on the Examen, how the break treated the practice, or anything shifted. 2. Say it: 'thinned out over the break' is a completely normal answer — the practice picks up where you are. 3. Take 2–3 contributions, then move. 4. Open door: anyone still carrying Evening 5, find a Companion before leaving today.</a:t>
+            </a:r>
+          </a:p>
+          <a:p>
+            <a:r>
               <a:t>CUES: Arranged parent opens (check the Run Card) — never cold-call a teen; pass-anytime holds.</a:t>
             </a:r>
           </a:p>
@@ -1297,55 +1291,46 @@
           <a:lstStyle/>
           <a:p>
             <a:r>
-              <a:rPr lang="en-US" sz="1200"/>
-              <a:t>S7 · 7:25–7:34 · LEAD: CONTENT PRESENTER</a:t>
-            </a:r>
-          </a:p>
-          <a:p>
-            <a:r>
-              <a:rPr lang="en-US" sz="1200"/>
+              <a:t>E6 · 7:25–7:34 · LEAD: CONTENT PRESENTER</a:t>
+            </a:r>
+          </a:p>
+          <a:p>
+            <a:r>
               <a:t>BEATS:</a:t>
             </a:r>
           </a:p>
           <a:p>
             <a:r>
-              <a:rPr lang="en-US" sz="1200"/>
               <a:t>1. After the break check-in: 'the three questions that went home two weeks ago — let's apply the process we use for the leader reflection to ourselves, as a group.' One rule, warmly: the group, never any one person.</a:t>
             </a:r>
           </a:p>
           <a:p>
             <a:r>
-              <a:rPr lang="en-US" sz="1200"/>
               <a:t>2. The leader answers FIRST — all three, briefly, a story or moment attached to each. Modeling that answers come with what you saw is the whole teaching.</a:t>
             </a:r>
           </a:p>
           <a:p>
             <a:r>
-              <a:rPr lang="en-US" sz="1200"/>
               <a:t>3. The room answers, any question, any order; the Co-Companion scribes keep · change · tell for tonight's debrief sheet. Thursday's Call maps their answers to the three signs — the team's side of the paper, never the room's.</a:t>
             </a:r>
           </a:p>
           <a:p>
             <a:r>
-              <a:rPr lang="en-US" sz="1200"/>
               <a:t>CUES: a bare verdict → 'say more — what did that look like?' · drifts toward a person → 'the group, never any one person — if something needs a name, bring it to one of us after.'</a:t>
             </a:r>
           </a:p>
           <a:p>
             <a:r>
-              <a:rPr lang="en-US" sz="1200"/>
               <a:t>POCKET (only if a gap matters): 'when hard things landed this quarter, how did we do?' · 'what would a brand-new family feel in their first ten minutes with us?'</a:t>
             </a:r>
           </a:p>
           <a:p>
             <a:r>
-              <a:rPr lang="en-US" sz="1200"/>
               <a:t>GUARD: receive everything without correcting — glowing or grim, it is data, not a draft the team edits. Close: 'a group that knows what it has can choose to keep it.'</a:t>
             </a:r>
           </a:p>
           <a:p>
             <a:r>
-              <a:rPr lang="en-US" sz="1200"/>
               <a:t>SUB: the answers modeled first are the leader's own — a substitute answers honestly for themselves.</a:t>
             </a:r>
           </a:p>
@@ -1392,13 +1377,11 @@
           <a:lstStyle/>
           <a:p>
             <a:r>
-              <a:rPr lang="en-US" sz="1200"/>
-              <a:t>S7 · 7:34–7:40 · LEAD: CONTENT PRESENTER</a:t>
-            </a:r>
-          </a:p>
-          <a:p>
-            <a:r>
-              <a:rPr lang="en-US" sz="1200"/>
+              <a:t>E6 · 7:34–7:40 · LEAD: CONTENT PRESENTER</a:t>
+            </a:r>
+          </a:p>
+          <a:p>
+            <a:r>
               <a:t>BEATS: 1. Read Romans 10:17 aloud, slow. 2. Teach the chain: Word, Hearing, Faith — faith is the fruit of a practice, not of trying harder. 3. John 10:27 — the sheep hear because they are His; the quiet road is still open, any evenings, any Companion. 4. Hearing is a skill; write PROAPT on the board: Pray, Read, Observe, Apply, Pray again, Tell. 5. Preview: whole room works Mark 1:14–20 together, then family pairs work the same passage.</a:t>
             </a:r>
           </a:p>
@@ -1445,25 +1428,21 @@
           <a:lstStyle/>
           <a:p>
             <a:r>
-              <a:rPr lang="en-US" sz="1200"/>
-              <a:t>S7 · 7:40–7:49 · LEAD: CONTENT PRESENTER</a:t>
-            </a:r>
-          </a:p>
-          <a:p>
-            <a:r>
-              <a:rPr lang="en-US" sz="1200"/>
+              <a:t>E6 · 7:40–7:49 · LEAD: CONTENT PRESENTER</a:t>
+            </a:r>
+          </a:p>
+          <a:p>
+            <a:r>
               <a:t>BEATS: 1. The most important teaching block of the night — walk all six steps on Mark 1:14–20, everyone on handout H7.2. 2. PRAY 90s (silence, then invite the Spirit aloud). READ 90s. OBSERVE 3 min — data first, then what surprises; take 3–4 shares, receive without evaluating. 3. APPLY 3 min — for YOU, today, specifically; 2–3 shares. 4. PRAY AGAIN 90s silence. TELL 60s — happens in the pairs later. 5. Hold the silences; do not rush.</a:t>
             </a:r>
           </a:p>
           <a:p>
             <a:r>
-              <a:rPr lang="en-US" sz="1200"/>
               <a:t>CUES: If an Apply goes vague or grand, push gently for one specific concrete application.</a:t>
             </a:r>
           </a:p>
           <a:p>
             <a:r>
-              <a:rPr lang="en-US" sz="1200"/>
               <a:t>WHY: the order protects the hearing — what the text says before what it means. 1. PRAY — we come to hear, not to extract; the Word is His. 2. READ — let it land whole before taking it apart. 3. OBSERVE, the data — the ground: what the page actually says, checkable by anyone; skipping it is where most misreadings start. OBSERVE, the interpretation — what it meant in its own world before it means anything in ours. 4. APPLY — where reading becomes hearing: one specific thing, for me, not for someone else. 5. PRAY AGAIN — hearing becomes a response; obedience starts here. 6. TELL — spoken hearing stays, and someone else hears what you heard. Full page: “PROAPT — What Each Step Is For” (Planning).</a:t>
             </a:r>
           </a:p>
@@ -1510,7 +1489,7 @@
           <a:lstStyle/>
           <a:p>
             <a:r>
-              <a:t>S7 · 7:49–7:50 · LEAD: CONTENT PRESENTER · TRANSITION</a:t>
+              <a:t>E6 · 7:49–7:50 · LEAD: CONTENT PRESENTER · TRANSITION</a:t>
             </a:r>
           </a:p>
           <a:p>
@@ -1566,7 +1545,7 @@
           <a:lstStyle/>
           <a:p>
             <a:r>
-              <a:t>S7 · 7:50–8:13 · LEAD: CONTENT PRESENTER · PAIRS</a:t>
+              <a:t>E6 · 7:50–8:13 · LEAD: CONTENT PRESENTER · PAIRS</a:t>
             </a:r>
           </a:p>
           <a:p>
@@ -1637,19 +1616,16 @@
           <a:lstStyle/>
           <a:p>
             <a:r>
-              <a:rPr lang="en-US" sz="1200"/>
-              <a:t>S7 · 8:13–8:19 · LEAD: CONTENT PRESENTER · PAIRS</a:t>
-            </a:r>
-          </a:p>
-          <a:p>
-            <a:r>
-              <a:rPr lang="en-US" sz="1200"/>
+              <a:t>E6 · 8:13–8:19 · LEAD: CONTENT PRESENTER · PAIRS</a:t>
+            </a:r>
+          </a:p>
+          <a:p>
+            <a:r>
               <a:t>BEATS: 1. Re-form pairs out of pairs. 2. Each person tells ONE specific thing they heard today — one sentence, witnessed. 3. Receive each with 'We hear that' or 'Thank you for naming that' — no preaching, no interpreting. 4. Close the pair: what we heard is given to be walked out this week.</a:t>
             </a:r>
           </a:p>
           <a:p>
             <a:r>
-              <a:rPr lang="en-US" sz="1200"/>
               <a:t>CUES: Arranged parent opens the round (check the Run Card) — never cold-call a teen; teens choose their own depth; pass-anytime holds.</a:t>
             </a:r>
           </a:p>
@@ -1696,19 +1672,16 @@
           <a:lstStyle/>
           <a:p>
             <a:r>
-              <a:rPr lang="en-US" sz="1200"/>
-              <a:t>S7 · 8:19–8:20 · LEAD: CONTENT PRESENTER</a:t>
-            </a:r>
-          </a:p>
-          <a:p>
-            <a:r>
-              <a:rPr lang="en-US" sz="1200"/>
+              <a:t>E6 · 8:19–8:20 · LEAD: CONTENT PRESENTER</a:t>
+            </a:r>
+          </a:p>
+          <a:p>
+            <a:r>
               <a:t>BEATS: 1. One word each — not what you heard (that is yours), but what the practice was like. 2. Introduce daily PROAPT: one short passage, five to ten minutes, every day — the journal Week 7 pages have the template. 3. Hold up H7.3: passage paths for teens and parents. 4. 'The chain only works if we work it.'</a:t>
             </a:r>
           </a:p>
           <a:p>
             <a:r>
-              <a:rPr lang="en-US" sz="1200"/>
               <a:t>CUES: Arranged parent begins the word round; anyone may pass.</a:t>
             </a:r>
           </a:p>
@@ -1755,19 +1728,16 @@
           <a:lstStyle/>
           <a:p>
             <a:r>
-              <a:rPr lang="en-US" sz="1200"/>
-              <a:t>S7 · 8:24–8:28 · LEAD: BOTH LEADERS</a:t>
-            </a:r>
-          </a:p>
-          <a:p>
-            <a:r>
-              <a:rPr lang="en-US" sz="1200"/>
+              <a:t>E6 · 8:24–8:28 · LEAD: BOTH LEADERS</a:t>
+            </a:r>
+          </a:p>
+          <a:p>
+            <a:r>
               <a:t>BEATS: 1. Same round every week, leader first: what went well today; what I'd do differently; what I'd tell someone teaching this process. 2. Then the room, same two questions — two or three voices is plenty. 3. Receive without defending — 'thank you' is the whole response.</a:t>
             </a:r>
           </a:p>
           <a:p>
             <a:r>
-              <a:rPr lang="en-US" sz="1200"/>
               <a:t>CUES: May be dropped if the room's energy needs something else; dropping it twice running goes to the team debrief.</a:t>
             </a:r>
           </a:p>
@@ -1814,7 +1784,7 @@
           <a:lstStyle/>
           <a:p>
             <a:r>
-              <a:t>S7 · 8:28–8:30 · LEAD: CONTAINER HOLDER</a:t>
+              <a:t>E6 · 8:28–8:30 · LEAD: CONTAINER HOLDER</a:t>
             </a:r>
           </a:p>
           <a:p>
@@ -1824,7 +1794,7 @@
           </a:p>
           <a:p>
             <a:r>
-              <a:t>CUES: Stay accessible after the close for anyone still carrying Week 6.</a:t>
+              <a:t>CUES: Stay accessible after the close for anyone still carrying Evening 5.</a:t>
             </a:r>
           </a:p>
         </p:txBody>
@@ -6039,7 +6009,7 @@
                 </a:solidFill>
                 <a:latin typeface="Calibri"/>
               </a:rPr>
-              <a:t>“Specific. One sentence. We listen to receive, like Week 3.”</a:t>
+              <a:t>“Specific. One sentence. We listen to receive, like Evening 3.”</a:t>
             </a:r>
           </a:p>
           <a:p>
@@ -7751,7 +7721,7 @@
                 </a:solidFill>
                 <a:latin typeface="Calibri"/>
               </a:rPr>
-              <a:t>SESSION 7–8</a:t>
+              <a:t>EVENING 6</a:t>
             </a:r>
           </a:p>
           <a:p>
@@ -7985,7 +7955,7 @@
                 </a:solidFill>
                 <a:latin typeface="Calibri"/>
               </a:rPr>
-              <a:t>Session 7–8 combined stands in the third box — </a:t>
+              <a:t>Evening 6 stands in the third box — </a:t>
             </a:r>
             <a:r>
               <a:rPr sz="1800" b="1">
@@ -8169,7 +8139,7 @@
                 </a:solidFill>
                 <a:latin typeface="Cambria"/>
               </a:rPr>
-              <a:t>Week 7 — My Story: The Eye Test</a:t>
+              <a:t>Evening 6 — My Story: The Eye Test</a:t>
             </a:r>
           </a:p>
         </p:txBody>
@@ -8477,7 +8447,7 @@
                 </a:solidFill>
                 <a:latin typeface="Cambria"/>
               </a:rPr>
-              <a:t>Session 7–8 — Tonight’s Road</a:t>
+              <a:t>Evening 6 — Tonight’s Road</a:t>
             </a:r>
           </a:p>
         </p:txBody>
@@ -9405,7 +9375,7 @@
                 </a:solidFill>
                 <a:latin typeface="Calibri"/>
               </a:rPr>
-              <a:t>Week 6 still sitting heavy? “The team is here. Find one of us before you leave tonight.”</a:t>
+              <a:t>Evening 5 still sitting heavy? “The team is here. Find one of us before you leave tonight.”</a:t>
             </a:r>
           </a:p>
         </p:txBody>

--- a/_implementation-notes/evening-series/FotH Evening Session 7-8 Combined Slides DRAFT v1.pptx
+++ b/_implementation-notes/evening-series/FotH Evening Session 7-8 Combined Slides DRAFT v1.pptx
@@ -1128,7 +1128,7 @@
           </a:p>
           <a:p>
             <a:r>
-              <a:t>CUES: Passage cards for both passages at each seat; the Pair Card printed, one per pair and a spare; the journal Week 7 pages carry the daily template.</a:t>
+              <a:t>CUES: Passage cards for both passages at each seat; the Pair Card printed, one per pair and a spare; your own journal, with the PROAPT page of the take-home as the daily template.</a:t>
             </a:r>
           </a:p>
         </p:txBody>
@@ -1677,7 +1677,7 @@
           </a:p>
           <a:p>
             <a:r>
-              <a:t>BEATS: 1. One word each — not what you heard (that is yours), but what the practice was like. 2. Introduce daily PROAPT: one short passage, five to ten minutes, every day — the journal Week 7 pages have the template. 3. Hold up H7.3: passage paths for teens and parents. 4. 'The chain only works if we work it.'</a:t>
+              <a:t>BEATS: 1. One word each — not what you heard (that is yours), but what the practice was like. 2. Introduce daily PROAPT: one short passage, five to ten minutes, every day — your own journal, with the PROAPT page of the take-home as the template. 3. Hold up H7.3: passage paths for teens and parents. 4. 'The chain only works if we work it.'</a:t>
             </a:r>
           </a:p>
           <a:p>
@@ -6306,7 +6306,7 @@
                 </a:solidFill>
                 <a:latin typeface="Calibri"/>
               </a:rPr>
-              <a:t>The journal Week 7 pages have a daily PROAPT template</a:t>
+              <a:t>Your own journal — the PROAPT page of the take-home is the template</a:t>
             </a:r>
           </a:p>
           <a:p>

--- a/_implementation-notes/evening-series/FotH Evening Session 7-8 Combined Slides DRAFT v1.pptx
+++ b/_implementation-notes/evening-series/FotH Evening Session 7-8 Combined Slides DRAFT v1.pptx
@@ -1621,12 +1621,22 @@
           </a:p>
           <a:p>
             <a:r>
-              <a:t>BEATS: 1. Re-form pairs out of pairs. 2. Each person tells ONE specific thing they heard today — one sentence, witnessed. 3. Receive each with 'We hear that' or 'Thank you for naming that' — no preaching, no interpreting. 4. Close the pair: what we heard is given to be walked out this week.</a:t>
+              <a:t>BEATS: 1. Stay in the pair you worked in: the Tell happens where you heard, before anyone moves. 2. Each person tells ONE specific thing they heard today — one sentence, witnessed. 3. Receive each with 'We hear that' or 'Thank you for naming that' — no preaching, no interpreting. 4. Close the pair: what we heard is given to be walked out this week.</a:t>
             </a:r>
           </a:p>
           <a:p>
             <a:r>
               <a:t>CUES: Arranged parent opens the round (check the Run Card) — never cold-call a teen; teens choose their own depth; pass-anytime holds.</a:t>
+            </a:r>
+          </a:p>
+          <a:p>
+            <a:r>
+              <a:t>IF TIME RAN SHORT: If only one of you walked the six steps, that one still tells. The Listener tells one thing they noticed while listening.</a:t>
+            </a:r>
+          </a:p>
+          <a:p>
+            <a:r>
+              <a:t>IN THE ROOM: On 26 October the pairs worked against the clock. Most pairs both walked the steps; at least one pair finished only one. Back in the circle, everyone had heard something of their own, and you could see and feel the excitement in the room. This is a high-impact practice: guard its time.</a:t>
             </a:r>
           </a:p>
         </p:txBody>
@@ -5984,7 +5994,7 @@
                 </a:solidFill>
                 <a:latin typeface="Calibri"/>
               </a:rPr>
-              <a:t>Back in the family pair — each of us tells ONE specific thing we heard tonight</a:t>
+              <a:t>Still in your family pair — each of us tells ONE specific thing we heard tonight</a:t>
             </a:r>
           </a:p>
           <a:p>

--- a/_implementation-notes/evening-series/FotH Evening Session 7-8 Combined Slides DRAFT v1.pptx
+++ b/_implementation-notes/evening-series/FotH Evening Session 7-8 Combined Slides DRAFT v1.pptx
@@ -1494,7 +1494,7 @@
           </a:p>
           <a:p>
             <a:r>
-              <a:t>BEATS: 1. Explain the pair shape: parent with your own teen by default; one Reader, one Listener; switch at twelve minutes. 2. The container holder keeps the clock and calls the switch at 8:02, the Tell at 8:13, and back in the circle at 8:19. 3. Hand each pair a Pair Card. 4. Pray and send.</a:t>
+              <a:t>BEATS: 1. Explain the pair shape: parent with your own teen by default; one Reader, one Listener; switch at twelve minutes. 2. The container holder keeps the clock and calls the switch at 8:02, the Tell at 8:13, and back in the circle at 8:16. 3. Hand each pair a Pair Card. 4. Pray and send.</a:t>
             </a:r>
           </a:p>
           <a:p>
@@ -1550,7 +1550,7 @@
           </a:p>
           <a:p>
             <a:r>
-              <a:t>TIME TARGETS (the container holder calls them): pass one 7:50–8:02; switch at 8:02; pass two 8:02–8:13; the Tell, still in the pair, 8:13–8:19; back in the circle at 8:19 for the merge. If the room is running late, keep the two passes equal and shorten both rather than drop the second.</a:t>
+              <a:t>TIME TARGETS (the container holder calls them): pass one 7:50–8:02; switch at 8:02; pass two 8:02–8:13; the Tell, still in the pair, 8:13–8:16; back in the circle at 8:16 for the merge. If the room is running late, keep the two passes equal and shorten both rather than drop the second.</a:t>
             </a:r>
           </a:p>
           <a:p>
@@ -1616,7 +1616,7 @@
           <a:lstStyle/>
           <a:p>
             <a:r>
-              <a:t>E6 · 8:13–8:19 · LEAD: CONTENT PRESENTER · PAIRS</a:t>
+              <a:t>E6 · 8:13–8:16 · LEAD: CONTENT PRESENTER · PAIRS</a:t>
             </a:r>
           </a:p>
           <a:p>
@@ -1631,12 +1631,12 @@
           </a:p>
           <a:p>
             <a:r>
-              <a:t>IF TIME RAN SHORT: If only one of you walked the six steps, that one still tells. The Listener tells one thing they noticed while listening.</a:t>
-            </a:r>
-          </a:p>
-          <a:p>
-            <a:r>
-              <a:t>IN THE ROOM: On 26 October the pairs worked against the clock. Most pairs both walked the steps; at least one pair finished only one. Back in the circle, everyone had heard something of their own, and you could see and feel the excitement in the room. This is a high-impact practice: guard its time.</a:t>
+              <a:t>IF TIME RAN SHORT: If only one of you walked the steps, that one tells; the Listener tells what they noticed.</a:t>
+            </a:r>
+          </a:p>
+          <a:p>
+            <a:r>
+              <a:t>IN THE ROOM: On 26 October, against the clock, at least one pair got only one person through. Back in the circle everyone had heard something, and the room was plainly excited. Guard this time.</a:t>
             </a:r>
           </a:p>
         </p:txBody>
@@ -1682,17 +1682,17 @@
           <a:lstStyle/>
           <a:p>
             <a:r>
-              <a:t>E6 · 8:19–8:20 · LEAD: CONTENT PRESENTER</a:t>
-            </a:r>
-          </a:p>
-          <a:p>
-            <a:r>
-              <a:t>BEATS: 1. One word each — not what you heard (that is yours), but what the practice was like. 2. Introduce daily PROAPT: one short passage, five to ten minutes, every day — your own journal, with the PROAPT page of the take-home as the template. 3. Hold up H7.3: passage paths for teens and parents. 4. 'The chain only works if we work it.'</a:t>
-            </a:r>
-          </a:p>
-          <a:p>
-            <a:r>
-              <a:t>CUES: Arranged parent begins the word round; anyone may pass.</a:t>
+              <a:t>E6 · 8:16–8:20 · LEAD: CONTENT PRESENTER</a:t>
+            </a:r>
+          </a:p>
+          <a:p>
+            <a:r>
+              <a:t>BEATS: 1. Each person says briefly what they heard tonight — the one sentence told in the pair. Receive it with 'We hear that'; no comment. On 26 October this was when the room came alive. 2. Introduce daily PROAPT: one short passage, five to ten minutes, every day — your own journal, with the PROAPT page of the take-home as the template. 3. Hold up H7.3: passage paths for teens and parents. 4. 'The chain only works if we work it.'</a:t>
+            </a:r>
+          </a:p>
+          <a:p>
+            <a:r>
+              <a:t>CUES: Arranged parent begins; anyone may pass; one sentence each.</a:t>
             </a:r>
           </a:p>
         </p:txBody>
@@ -6266,7 +6266,7 @@
                 </a:solidFill>
                 <a:latin typeface="Calibri"/>
               </a:rPr>
-              <a:t>One word each — not what you heard (that’s yours), but what tonight’s practice was like; a parent begins</a:t>
+              <a:t>Back in the circle — each of us says briefly what we heard tonight: one sentence; a parent begins; pass-anytime holds</a:t>
             </a:r>
           </a:p>
           <a:p>
